--- a/中越詩歌/流血之泉_Suối huyết tuôn.pptx
+++ b/中越詩歌/流血之泉_Suối huyết tuôn.pptx
@@ -144,6 +144,11 @@
       </a:defRPr>
     </a:lvl9pPr>
   </p:defaultTextStyle>
+  <p:extLst>
+    <p:ext uri="{EFAFB233-063F-42B5-8137-9DF3F51BA10A}">
+      <p15:sldGuideLst xmlns:p15="http://schemas.microsoft.com/office/powerpoint/2012/main"/>
+    </p:ext>
+  </p:extLst>
 </p:presentation>
 </file>
 
@@ -185,7 +190,7 @@
           <a:lstStyle/>
           <a:p>
             <a:r>
-              <a:rPr lang="en-US" altLang="zh-TW" smtClean="0"/>
+              <a:rPr lang="en-US" altLang="zh-TW"/>
               <a:t>Click to edit Master title style</a:t>
             </a:r>
             <a:endParaRPr lang="zh-TW" altLang="en-US"/>
@@ -304,7 +309,7 @@
           </a:lstStyle>
           <a:p>
             <a:r>
-              <a:rPr lang="en-US" altLang="zh-TW" smtClean="0"/>
+              <a:rPr lang="en-US" altLang="zh-TW"/>
               <a:t>Click to edit Master subtitle style</a:t>
             </a:r>
             <a:endParaRPr lang="zh-TW" altLang="en-US"/>
@@ -328,7 +333,7 @@
           <a:p>
             <a:fld id="{FA70AFE3-0964-4CB6-9B1E-2095579900BD}" type="datetimeFigureOut">
               <a:rPr lang="vi-VN" smtClean="0"/>
-              <a:t>06/04/2023</a:t>
+              <a:t>28/03/2024</a:t>
             </a:fld>
             <a:endParaRPr lang="vi-VN"/>
           </a:p>
@@ -422,7 +427,7 @@
           <a:lstStyle/>
           <a:p>
             <a:r>
-              <a:rPr lang="en-US" altLang="zh-TW" smtClean="0"/>
+              <a:rPr lang="en-US" altLang="zh-TW"/>
               <a:t>Click to edit Master title style</a:t>
             </a:r>
             <a:endParaRPr lang="zh-TW" altLang="en-US"/>
@@ -446,35 +451,35 @@
           <a:p>
             <a:pPr lvl="0"/>
             <a:r>
-              <a:rPr lang="en-US" altLang="zh-TW" smtClean="0"/>
+              <a:rPr lang="en-US" altLang="zh-TW"/>
               <a:t>Edit Master text styles</a:t>
             </a:r>
           </a:p>
           <a:p>
             <a:pPr lvl="1"/>
             <a:r>
-              <a:rPr lang="en-US" altLang="zh-TW" smtClean="0"/>
+              <a:rPr lang="en-US" altLang="zh-TW"/>
               <a:t>Second level</a:t>
             </a:r>
           </a:p>
           <a:p>
             <a:pPr lvl="2"/>
             <a:r>
-              <a:rPr lang="en-US" altLang="zh-TW" smtClean="0"/>
+              <a:rPr lang="en-US" altLang="zh-TW"/>
               <a:t>Third level</a:t>
             </a:r>
           </a:p>
           <a:p>
             <a:pPr lvl="3"/>
             <a:r>
-              <a:rPr lang="en-US" altLang="zh-TW" smtClean="0"/>
+              <a:rPr lang="en-US" altLang="zh-TW"/>
               <a:t>Fourth level</a:t>
             </a:r>
           </a:p>
           <a:p>
             <a:pPr lvl="4"/>
             <a:r>
-              <a:rPr lang="en-US" altLang="zh-TW" smtClean="0"/>
+              <a:rPr lang="en-US" altLang="zh-TW"/>
               <a:t>Fifth level</a:t>
             </a:r>
             <a:endParaRPr lang="zh-TW" altLang="en-US"/>
@@ -498,7 +503,7 @@
           <a:p>
             <a:fld id="{FA70AFE3-0964-4CB6-9B1E-2095579900BD}" type="datetimeFigureOut">
               <a:rPr lang="vi-VN" smtClean="0"/>
-              <a:t>06/04/2023</a:t>
+              <a:t>28/03/2024</a:t>
             </a:fld>
             <a:endParaRPr lang="vi-VN"/>
           </a:p>
@@ -597,7 +602,7 @@
           <a:lstStyle/>
           <a:p>
             <a:r>
-              <a:rPr lang="en-US" altLang="zh-TW" smtClean="0"/>
+              <a:rPr lang="en-US" altLang="zh-TW"/>
               <a:t>Click to edit Master title style</a:t>
             </a:r>
             <a:endParaRPr lang="zh-TW" altLang="en-US"/>
@@ -626,35 +631,35 @@
           <a:p>
             <a:pPr lvl="0"/>
             <a:r>
-              <a:rPr lang="en-US" altLang="zh-TW" smtClean="0"/>
+              <a:rPr lang="en-US" altLang="zh-TW"/>
               <a:t>Edit Master text styles</a:t>
             </a:r>
           </a:p>
           <a:p>
             <a:pPr lvl="1"/>
             <a:r>
-              <a:rPr lang="en-US" altLang="zh-TW" smtClean="0"/>
+              <a:rPr lang="en-US" altLang="zh-TW"/>
               <a:t>Second level</a:t>
             </a:r>
           </a:p>
           <a:p>
             <a:pPr lvl="2"/>
             <a:r>
-              <a:rPr lang="en-US" altLang="zh-TW" smtClean="0"/>
+              <a:rPr lang="en-US" altLang="zh-TW"/>
               <a:t>Third level</a:t>
             </a:r>
           </a:p>
           <a:p>
             <a:pPr lvl="3"/>
             <a:r>
-              <a:rPr lang="en-US" altLang="zh-TW" smtClean="0"/>
+              <a:rPr lang="en-US" altLang="zh-TW"/>
               <a:t>Fourth level</a:t>
             </a:r>
           </a:p>
           <a:p>
             <a:pPr lvl="4"/>
             <a:r>
-              <a:rPr lang="en-US" altLang="zh-TW" smtClean="0"/>
+              <a:rPr lang="en-US" altLang="zh-TW"/>
               <a:t>Fifth level</a:t>
             </a:r>
             <a:endParaRPr lang="zh-TW" altLang="en-US"/>
@@ -678,7 +683,7 @@
           <a:p>
             <a:fld id="{FA70AFE3-0964-4CB6-9B1E-2095579900BD}" type="datetimeFigureOut">
               <a:rPr lang="vi-VN" smtClean="0"/>
-              <a:t>06/04/2023</a:t>
+              <a:t>28/03/2024</a:t>
             </a:fld>
             <a:endParaRPr lang="vi-VN"/>
           </a:p>
@@ -772,7 +777,7 @@
           <a:lstStyle/>
           <a:p>
             <a:r>
-              <a:rPr lang="en-US" altLang="zh-TW" smtClean="0"/>
+              <a:rPr lang="en-US" altLang="zh-TW"/>
               <a:t>Click to edit Master title style</a:t>
             </a:r>
             <a:endParaRPr lang="zh-TW" altLang="en-US"/>
@@ -796,35 +801,35 @@
           <a:p>
             <a:pPr lvl="0"/>
             <a:r>
-              <a:rPr lang="en-US" altLang="zh-TW" smtClean="0"/>
+              <a:rPr lang="en-US" altLang="zh-TW"/>
               <a:t>Edit Master text styles</a:t>
             </a:r>
           </a:p>
           <a:p>
             <a:pPr lvl="1"/>
             <a:r>
-              <a:rPr lang="en-US" altLang="zh-TW" smtClean="0"/>
+              <a:rPr lang="en-US" altLang="zh-TW"/>
               <a:t>Second level</a:t>
             </a:r>
           </a:p>
           <a:p>
             <a:pPr lvl="2"/>
             <a:r>
-              <a:rPr lang="en-US" altLang="zh-TW" smtClean="0"/>
+              <a:rPr lang="en-US" altLang="zh-TW"/>
               <a:t>Third level</a:t>
             </a:r>
           </a:p>
           <a:p>
             <a:pPr lvl="3"/>
             <a:r>
-              <a:rPr lang="en-US" altLang="zh-TW" smtClean="0"/>
+              <a:rPr lang="en-US" altLang="zh-TW"/>
               <a:t>Fourth level</a:t>
             </a:r>
           </a:p>
           <a:p>
             <a:pPr lvl="4"/>
             <a:r>
-              <a:rPr lang="en-US" altLang="zh-TW" smtClean="0"/>
+              <a:rPr lang="en-US" altLang="zh-TW"/>
               <a:t>Fifth level</a:t>
             </a:r>
             <a:endParaRPr lang="zh-TW" altLang="en-US"/>
@@ -848,7 +853,7 @@
           <a:p>
             <a:fld id="{FA70AFE3-0964-4CB6-9B1E-2095579900BD}" type="datetimeFigureOut">
               <a:rPr lang="vi-VN" smtClean="0"/>
-              <a:t>06/04/2023</a:t>
+              <a:t>28/03/2024</a:t>
             </a:fld>
             <a:endParaRPr lang="vi-VN"/>
           </a:p>
@@ -951,7 +956,7 @@
           </a:lstStyle>
           <a:p>
             <a:r>
-              <a:rPr lang="en-US" altLang="zh-TW" smtClean="0"/>
+              <a:rPr lang="en-US" altLang="zh-TW"/>
               <a:t>Click to edit Master title style</a:t>
             </a:r>
             <a:endParaRPr lang="zh-TW" altLang="en-US"/>
@@ -1071,7 +1076,7 @@
           <a:p>
             <a:pPr lvl="0"/>
             <a:r>
-              <a:rPr lang="en-US" altLang="zh-TW" smtClean="0"/>
+              <a:rPr lang="en-US" altLang="zh-TW"/>
               <a:t>Edit Master text styles</a:t>
             </a:r>
           </a:p>
@@ -1094,7 +1099,7 @@
           <a:p>
             <a:fld id="{FA70AFE3-0964-4CB6-9B1E-2095579900BD}" type="datetimeFigureOut">
               <a:rPr lang="vi-VN" smtClean="0"/>
-              <a:t>06/04/2023</a:t>
+              <a:t>28/03/2024</a:t>
             </a:fld>
             <a:endParaRPr lang="vi-VN"/>
           </a:p>
@@ -1188,7 +1193,7 @@
           <a:lstStyle/>
           <a:p>
             <a:r>
-              <a:rPr lang="en-US" altLang="zh-TW" smtClean="0"/>
+              <a:rPr lang="en-US" altLang="zh-TW"/>
               <a:t>Click to edit Master title style</a:t>
             </a:r>
             <a:endParaRPr lang="zh-TW" altLang="en-US"/>
@@ -1245,35 +1250,35 @@
           <a:p>
             <a:pPr lvl="0"/>
             <a:r>
-              <a:rPr lang="en-US" altLang="zh-TW" smtClean="0"/>
+              <a:rPr lang="en-US" altLang="zh-TW"/>
               <a:t>Edit Master text styles</a:t>
             </a:r>
           </a:p>
           <a:p>
             <a:pPr lvl="1"/>
             <a:r>
-              <a:rPr lang="en-US" altLang="zh-TW" smtClean="0"/>
+              <a:rPr lang="en-US" altLang="zh-TW"/>
               <a:t>Second level</a:t>
             </a:r>
           </a:p>
           <a:p>
             <a:pPr lvl="2"/>
             <a:r>
-              <a:rPr lang="en-US" altLang="zh-TW" smtClean="0"/>
+              <a:rPr lang="en-US" altLang="zh-TW"/>
               <a:t>Third level</a:t>
             </a:r>
           </a:p>
           <a:p>
             <a:pPr lvl="3"/>
             <a:r>
-              <a:rPr lang="en-US" altLang="zh-TW" smtClean="0"/>
+              <a:rPr lang="en-US" altLang="zh-TW"/>
               <a:t>Fourth level</a:t>
             </a:r>
           </a:p>
           <a:p>
             <a:pPr lvl="4"/>
             <a:r>
-              <a:rPr lang="en-US" altLang="zh-TW" smtClean="0"/>
+              <a:rPr lang="en-US" altLang="zh-TW"/>
               <a:t>Fifth level</a:t>
             </a:r>
             <a:endParaRPr lang="zh-TW" altLang="en-US"/>
@@ -1330,35 +1335,35 @@
           <a:p>
             <a:pPr lvl="0"/>
             <a:r>
-              <a:rPr lang="en-US" altLang="zh-TW" smtClean="0"/>
+              <a:rPr lang="en-US" altLang="zh-TW"/>
               <a:t>Edit Master text styles</a:t>
             </a:r>
           </a:p>
           <a:p>
             <a:pPr lvl="1"/>
             <a:r>
-              <a:rPr lang="en-US" altLang="zh-TW" smtClean="0"/>
+              <a:rPr lang="en-US" altLang="zh-TW"/>
               <a:t>Second level</a:t>
             </a:r>
           </a:p>
           <a:p>
             <a:pPr lvl="2"/>
             <a:r>
-              <a:rPr lang="en-US" altLang="zh-TW" smtClean="0"/>
+              <a:rPr lang="en-US" altLang="zh-TW"/>
               <a:t>Third level</a:t>
             </a:r>
           </a:p>
           <a:p>
             <a:pPr lvl="3"/>
             <a:r>
-              <a:rPr lang="en-US" altLang="zh-TW" smtClean="0"/>
+              <a:rPr lang="en-US" altLang="zh-TW"/>
               <a:t>Fourth level</a:t>
             </a:r>
           </a:p>
           <a:p>
             <a:pPr lvl="4"/>
             <a:r>
-              <a:rPr lang="en-US" altLang="zh-TW" smtClean="0"/>
+              <a:rPr lang="en-US" altLang="zh-TW"/>
               <a:t>Fifth level</a:t>
             </a:r>
             <a:endParaRPr lang="zh-TW" altLang="en-US"/>
@@ -1382,7 +1387,7 @@
           <a:p>
             <a:fld id="{FA70AFE3-0964-4CB6-9B1E-2095579900BD}" type="datetimeFigureOut">
               <a:rPr lang="vi-VN" smtClean="0"/>
-              <a:t>06/04/2023</a:t>
+              <a:t>28/03/2024</a:t>
             </a:fld>
             <a:endParaRPr lang="vi-VN"/>
           </a:p>
@@ -1480,7 +1485,7 @@
           </a:lstStyle>
           <a:p>
             <a:r>
-              <a:rPr lang="en-US" altLang="zh-TW" smtClean="0"/>
+              <a:rPr lang="en-US" altLang="zh-TW"/>
               <a:t>Click to edit Master title style</a:t>
             </a:r>
             <a:endParaRPr lang="zh-TW" altLang="en-US"/>
@@ -1546,7 +1551,7 @@
           <a:p>
             <a:pPr lvl="0"/>
             <a:r>
-              <a:rPr lang="en-US" altLang="zh-TW" smtClean="0"/>
+              <a:rPr lang="en-US" altLang="zh-TW"/>
               <a:t>Edit Master text styles</a:t>
             </a:r>
           </a:p>
@@ -1602,35 +1607,35 @@
           <a:p>
             <a:pPr lvl="0"/>
             <a:r>
-              <a:rPr lang="en-US" altLang="zh-TW" smtClean="0"/>
+              <a:rPr lang="en-US" altLang="zh-TW"/>
               <a:t>Edit Master text styles</a:t>
             </a:r>
           </a:p>
           <a:p>
             <a:pPr lvl="1"/>
             <a:r>
-              <a:rPr lang="en-US" altLang="zh-TW" smtClean="0"/>
+              <a:rPr lang="en-US" altLang="zh-TW"/>
               <a:t>Second level</a:t>
             </a:r>
           </a:p>
           <a:p>
             <a:pPr lvl="2"/>
             <a:r>
-              <a:rPr lang="en-US" altLang="zh-TW" smtClean="0"/>
+              <a:rPr lang="en-US" altLang="zh-TW"/>
               <a:t>Third level</a:t>
             </a:r>
           </a:p>
           <a:p>
             <a:pPr lvl="3"/>
             <a:r>
-              <a:rPr lang="en-US" altLang="zh-TW" smtClean="0"/>
+              <a:rPr lang="en-US" altLang="zh-TW"/>
               <a:t>Fourth level</a:t>
             </a:r>
           </a:p>
           <a:p>
             <a:pPr lvl="4"/>
             <a:r>
-              <a:rPr lang="en-US" altLang="zh-TW" smtClean="0"/>
+              <a:rPr lang="en-US" altLang="zh-TW"/>
               <a:t>Fifth level</a:t>
             </a:r>
             <a:endParaRPr lang="zh-TW" altLang="en-US"/>
@@ -1696,7 +1701,7 @@
           <a:p>
             <a:pPr lvl="0"/>
             <a:r>
-              <a:rPr lang="en-US" altLang="zh-TW" smtClean="0"/>
+              <a:rPr lang="en-US" altLang="zh-TW"/>
               <a:t>Edit Master text styles</a:t>
             </a:r>
           </a:p>
@@ -1752,35 +1757,35 @@
           <a:p>
             <a:pPr lvl="0"/>
             <a:r>
-              <a:rPr lang="en-US" altLang="zh-TW" smtClean="0"/>
+              <a:rPr lang="en-US" altLang="zh-TW"/>
               <a:t>Edit Master text styles</a:t>
             </a:r>
           </a:p>
           <a:p>
             <a:pPr lvl="1"/>
             <a:r>
-              <a:rPr lang="en-US" altLang="zh-TW" smtClean="0"/>
+              <a:rPr lang="en-US" altLang="zh-TW"/>
               <a:t>Second level</a:t>
             </a:r>
           </a:p>
           <a:p>
             <a:pPr lvl="2"/>
             <a:r>
-              <a:rPr lang="en-US" altLang="zh-TW" smtClean="0"/>
+              <a:rPr lang="en-US" altLang="zh-TW"/>
               <a:t>Third level</a:t>
             </a:r>
           </a:p>
           <a:p>
             <a:pPr lvl="3"/>
             <a:r>
-              <a:rPr lang="en-US" altLang="zh-TW" smtClean="0"/>
+              <a:rPr lang="en-US" altLang="zh-TW"/>
               <a:t>Fourth level</a:t>
             </a:r>
           </a:p>
           <a:p>
             <a:pPr lvl="4"/>
             <a:r>
-              <a:rPr lang="en-US" altLang="zh-TW" smtClean="0"/>
+              <a:rPr lang="en-US" altLang="zh-TW"/>
               <a:t>Fifth level</a:t>
             </a:r>
             <a:endParaRPr lang="zh-TW" altLang="en-US"/>
@@ -1804,7 +1809,7 @@
           <a:p>
             <a:fld id="{FA70AFE3-0964-4CB6-9B1E-2095579900BD}" type="datetimeFigureOut">
               <a:rPr lang="vi-VN" smtClean="0"/>
-              <a:t>06/04/2023</a:t>
+              <a:t>28/03/2024</a:t>
             </a:fld>
             <a:endParaRPr lang="vi-VN"/>
           </a:p>
@@ -1898,7 +1903,7 @@
           <a:lstStyle/>
           <a:p>
             <a:r>
-              <a:rPr lang="en-US" altLang="zh-TW" smtClean="0"/>
+              <a:rPr lang="en-US" altLang="zh-TW"/>
               <a:t>Click to edit Master title style</a:t>
             </a:r>
             <a:endParaRPr lang="zh-TW" altLang="en-US"/>
@@ -1922,7 +1927,7 @@
           <a:p>
             <a:fld id="{FA70AFE3-0964-4CB6-9B1E-2095579900BD}" type="datetimeFigureOut">
               <a:rPr lang="vi-VN" smtClean="0"/>
-              <a:t>06/04/2023</a:t>
+              <a:t>28/03/2024</a:t>
             </a:fld>
             <a:endParaRPr lang="vi-VN"/>
           </a:p>
@@ -2017,7 +2022,7 @@
           <a:p>
             <a:fld id="{FA70AFE3-0964-4CB6-9B1E-2095579900BD}" type="datetimeFigureOut">
               <a:rPr lang="vi-VN" smtClean="0"/>
-              <a:t>06/04/2023</a:t>
+              <a:t>28/03/2024</a:t>
             </a:fld>
             <a:endParaRPr lang="vi-VN"/>
           </a:p>
@@ -2120,7 +2125,7 @@
           </a:lstStyle>
           <a:p>
             <a:r>
-              <a:rPr lang="en-US" altLang="zh-TW" smtClean="0"/>
+              <a:rPr lang="en-US" altLang="zh-TW"/>
               <a:t>Click to edit Master title style</a:t>
             </a:r>
             <a:endParaRPr lang="zh-TW" altLang="en-US"/>
@@ -2177,35 +2182,35 @@
           <a:p>
             <a:pPr lvl="0"/>
             <a:r>
-              <a:rPr lang="en-US" altLang="zh-TW" smtClean="0"/>
+              <a:rPr lang="en-US" altLang="zh-TW"/>
               <a:t>Edit Master text styles</a:t>
             </a:r>
           </a:p>
           <a:p>
             <a:pPr lvl="1"/>
             <a:r>
-              <a:rPr lang="en-US" altLang="zh-TW" smtClean="0"/>
+              <a:rPr lang="en-US" altLang="zh-TW"/>
               <a:t>Second level</a:t>
             </a:r>
           </a:p>
           <a:p>
             <a:pPr lvl="2"/>
             <a:r>
-              <a:rPr lang="en-US" altLang="zh-TW" smtClean="0"/>
+              <a:rPr lang="en-US" altLang="zh-TW"/>
               <a:t>Third level</a:t>
             </a:r>
           </a:p>
           <a:p>
             <a:pPr lvl="3"/>
             <a:r>
-              <a:rPr lang="en-US" altLang="zh-TW" smtClean="0"/>
+              <a:rPr lang="en-US" altLang="zh-TW"/>
               <a:t>Fourth level</a:t>
             </a:r>
           </a:p>
           <a:p>
             <a:pPr lvl="4"/>
             <a:r>
-              <a:rPr lang="en-US" altLang="zh-TW" smtClean="0"/>
+              <a:rPr lang="en-US" altLang="zh-TW"/>
               <a:t>Fifth level</a:t>
             </a:r>
             <a:endParaRPr lang="zh-TW" altLang="en-US"/>
@@ -2271,7 +2276,7 @@
           <a:p>
             <a:pPr lvl="0"/>
             <a:r>
-              <a:rPr lang="en-US" altLang="zh-TW" smtClean="0"/>
+              <a:rPr lang="en-US" altLang="zh-TW"/>
               <a:t>Edit Master text styles</a:t>
             </a:r>
           </a:p>
@@ -2294,7 +2299,7 @@
           <a:p>
             <a:fld id="{FA70AFE3-0964-4CB6-9B1E-2095579900BD}" type="datetimeFigureOut">
               <a:rPr lang="vi-VN" smtClean="0"/>
-              <a:t>06/04/2023</a:t>
+              <a:t>28/03/2024</a:t>
             </a:fld>
             <a:endParaRPr lang="vi-VN"/>
           </a:p>
@@ -2397,7 +2402,7 @@
           </a:lstStyle>
           <a:p>
             <a:r>
-              <a:rPr lang="en-US" altLang="zh-TW" smtClean="0"/>
+              <a:rPr lang="en-US" altLang="zh-TW"/>
               <a:t>Click to edit Master title style</a:t>
             </a:r>
             <a:endParaRPr lang="zh-TW" altLang="en-US"/>
@@ -2462,7 +2467,7 @@
           </a:lstStyle>
           <a:p>
             <a:r>
-              <a:rPr lang="en-US" altLang="zh-TW" smtClean="0"/>
+              <a:rPr lang="en-US" altLang="zh-TW"/>
               <a:t>Click icon to add picture</a:t>
             </a:r>
             <a:endParaRPr lang="zh-TW" altLang="en-US"/>
@@ -2528,7 +2533,7 @@
           <a:p>
             <a:pPr lvl="0"/>
             <a:r>
-              <a:rPr lang="en-US" altLang="zh-TW" smtClean="0"/>
+              <a:rPr lang="en-US" altLang="zh-TW"/>
               <a:t>Edit Master text styles</a:t>
             </a:r>
           </a:p>
@@ -2551,7 +2556,7 @@
           <a:p>
             <a:fld id="{FA70AFE3-0964-4CB6-9B1E-2095579900BD}" type="datetimeFigureOut">
               <a:rPr lang="vi-VN" smtClean="0"/>
-              <a:t>06/04/2023</a:t>
+              <a:t>28/03/2024</a:t>
             </a:fld>
             <a:endParaRPr lang="vi-VN"/>
           </a:p>
@@ -2665,10 +2670,9 @@
           <a:lstStyle/>
           <a:p>
             <a:r>
-              <a:rPr lang="zh-TW" altLang="en-US" smtClean="0"/>
+              <a:rPr lang="zh-TW" altLang="en-US"/>
               <a:t>按一下以編輯母片標題樣式</a:t>
             </a:r>
-            <a:endParaRPr lang="zh-TW" altLang="en-US"/>
           </a:p>
         </p:txBody>
       </p:sp>
@@ -2699,38 +2703,37 @@
           <a:p>
             <a:pPr lvl="0"/>
             <a:r>
-              <a:rPr lang="zh-TW" altLang="en-US" smtClean="0"/>
+              <a:rPr lang="zh-TW" altLang="en-US"/>
               <a:t>按一下以編輯母片文字樣式</a:t>
             </a:r>
           </a:p>
           <a:p>
             <a:pPr lvl="1"/>
             <a:r>
-              <a:rPr lang="zh-TW" altLang="en-US" smtClean="0"/>
+              <a:rPr lang="zh-TW" altLang="en-US"/>
               <a:t>第二層</a:t>
             </a:r>
           </a:p>
           <a:p>
             <a:pPr lvl="2"/>
             <a:r>
-              <a:rPr lang="zh-TW" altLang="en-US" smtClean="0"/>
+              <a:rPr lang="zh-TW" altLang="en-US"/>
               <a:t>第三層</a:t>
             </a:r>
           </a:p>
           <a:p>
             <a:pPr lvl="3"/>
             <a:r>
-              <a:rPr lang="zh-TW" altLang="en-US" smtClean="0"/>
+              <a:rPr lang="zh-TW" altLang="en-US"/>
               <a:t>第四層</a:t>
             </a:r>
           </a:p>
           <a:p>
             <a:pPr lvl="4"/>
             <a:r>
-              <a:rPr lang="zh-TW" altLang="en-US" smtClean="0"/>
+              <a:rPr lang="zh-TW" altLang="en-US"/>
               <a:t>第五層</a:t>
             </a:r>
-            <a:endParaRPr lang="zh-TW" altLang="en-US"/>
           </a:p>
         </p:txBody>
       </p:sp>
@@ -2769,7 +2772,7 @@
           <a:p>
             <a:fld id="{FA70AFE3-0964-4CB6-9B1E-2095579900BD}" type="datetimeFigureOut">
               <a:rPr lang="vi-VN" smtClean="0"/>
-              <a:t>06/04/2023</a:t>
+              <a:t>28/03/2024</a:t>
             </a:fld>
             <a:endParaRPr lang="vi-VN"/>
           </a:p>
@@ -3167,7 +3170,7 @@
           <a:lstStyle/>
           <a:p>
             <a:r>
-              <a:rPr lang="zh-CN" altLang="en-US" b="1" dirty="0" smtClean="0">
+              <a:rPr lang="zh-CN" altLang="en-US" b="1" dirty="0">
                 <a:solidFill>
                   <a:srgbClr val="000066"/>
                 </a:solidFill>
@@ -3184,7 +3187,7 @@
               <a:t>宣 </a:t>
             </a:r>
             <a:r>
-              <a:rPr lang="en-US" altLang="zh-CN" b="1" dirty="0" smtClean="0">
+              <a:rPr lang="en-US" altLang="zh-CN" b="1" dirty="0">
                 <a:solidFill>
                   <a:srgbClr val="000066"/>
                 </a:solidFill>
@@ -3201,7 +3204,7 @@
               <a:t>49</a:t>
             </a:r>
             <a:r>
-              <a:rPr lang="zh-TW" altLang="en-US" sz="7200" b="1" i="1" dirty="0" smtClean="0">
+              <a:rPr lang="zh-TW" altLang="en-US" sz="7200" b="1" i="1" dirty="0">
                 <a:solidFill>
                   <a:srgbClr val="000066"/>
                 </a:solidFill>
@@ -3218,7 +3221,7 @@
               <a:t> </a:t>
             </a:r>
             <a:r>
-              <a:rPr lang="zh-CN" altLang="en-US" sz="7200" b="1" dirty="0" smtClean="0">
+              <a:rPr lang="zh-CN" altLang="en-US" sz="7200" b="1" dirty="0">
                 <a:solidFill>
                   <a:srgbClr val="000066"/>
                 </a:solidFill>
@@ -3232,24 +3235,7 @@
                 <a:latin typeface="微軟正黑體" pitchFamily="34" charset="-120"/>
                 <a:ea typeface="微軟正黑體" pitchFamily="34" charset="-120"/>
               </a:rPr>
-              <a:t>流</a:t>
-            </a:r>
-            <a:r>
-              <a:rPr lang="zh-CN" altLang="en-US" sz="7200" b="1" dirty="0">
-                <a:solidFill>
-                  <a:srgbClr val="000066"/>
-                </a:solidFill>
-                <a:effectLst>
-                  <a:outerShdw blurRad="38100" dist="38100" dir="2700000" algn="tl">
-                    <a:srgbClr val="000000">
-                      <a:alpha val="43137"/>
-                    </a:srgbClr>
-                  </a:outerShdw>
-                </a:effectLst>
-                <a:latin typeface="微軟正黑體" pitchFamily="34" charset="-120"/>
-                <a:ea typeface="微軟正黑體" pitchFamily="34" charset="-120"/>
-              </a:rPr>
-              <a:t>血之泉</a:t>
+              <a:t>流血之泉</a:t>
             </a:r>
             <a:endParaRPr lang="zh-TW" altLang="en-US" sz="7200" b="1" dirty="0">
               <a:solidFill>
@@ -3322,28 +3308,10 @@
                 <a:ea typeface="微軟正黑體" pitchFamily="34" charset="-120"/>
                 <a:cs typeface="Calibri" panose="020F0502020204030204" pitchFamily="34" charset="0"/>
               </a:rPr>
-              <a:t>TC </a:t>
-            </a:r>
-            <a:r>
-              <a:rPr lang="vi-VN" altLang="zh-TW" sz="5333" b="1" dirty="0" smtClean="0">
-                <a:solidFill>
-                  <a:srgbClr val="660033"/>
-                </a:solidFill>
-                <a:effectLst>
-                  <a:outerShdw blurRad="38100" dist="38100" dir="2700000" algn="tl">
-                    <a:srgbClr val="000000">
-                      <a:alpha val="43137"/>
-                    </a:srgbClr>
-                  </a:outerShdw>
-                </a:effectLst>
-                <a:latin typeface="Calibri" panose="020F0502020204030204" pitchFamily="34" charset="0"/>
-                <a:ea typeface="微軟正黑體" pitchFamily="34" charset="-120"/>
-                <a:cs typeface="Calibri" panose="020F0502020204030204" pitchFamily="34" charset="0"/>
-              </a:rPr>
-              <a:t>181</a:t>
-            </a:r>
-            <a:r>
-              <a:rPr lang="vi-VN" altLang="zh-TW" b="1" dirty="0" smtClean="0">
+              <a:t>TC 181</a:t>
+            </a:r>
+            <a:r>
+              <a:rPr lang="vi-VN" altLang="zh-TW" b="1" dirty="0">
                 <a:solidFill>
                   <a:srgbClr val="660033"/>
                 </a:solidFill>
@@ -3443,13 +3411,6 @@
               </a:rPr>
               <a:t>盜賊臨死切心求救</a:t>
             </a:r>
-            <a:endParaRPr lang="zh-TW" altLang="en-US" sz="6600" b="1" dirty="0">
-              <a:solidFill>
-                <a:srgbClr val="000066"/>
-              </a:solidFill>
-              <a:latin typeface="微軟正黑體" pitchFamily="34" charset="-120"/>
-              <a:ea typeface="微軟正黑體" pitchFamily="34" charset="-120"/>
-            </a:endParaRPr>
           </a:p>
         </p:txBody>
       </p:sp>
@@ -3666,39 +3627,7 @@
                   <a:srgbClr val="000066"/>
                 </a:solidFill>
               </a:rPr>
-              <a:t>( </a:t>
-            </a:r>
-            <a:r>
-              <a:rPr lang="en-US" sz="3600" b="1" dirty="0" smtClean="0">
-                <a:solidFill>
-                  <a:srgbClr val="000066"/>
-                </a:solidFill>
-              </a:rPr>
-              <a:t>2 </a:t>
-            </a:r>
-            <a:r>
-              <a:rPr lang="en-US" sz="3600" b="1" dirty="0" smtClean="0">
-                <a:solidFill>
-                  <a:srgbClr val="000066"/>
-                </a:solidFill>
-              </a:rPr>
-              <a:t>/ </a:t>
-            </a:r>
-            <a:r>
-              <a:rPr lang="en-US" sz="3600" b="1" dirty="0" smtClean="0">
-                <a:solidFill>
-                  <a:srgbClr val="000066"/>
-                </a:solidFill>
-              </a:rPr>
-              <a:t>5 </a:t>
-            </a:r>
-            <a:r>
-              <a:rPr lang="en-US" sz="3600" b="1" dirty="0" smtClean="0">
-                <a:solidFill>
-                  <a:srgbClr val="000066"/>
-                </a:solidFill>
-              </a:rPr>
-              <a:t>)</a:t>
+              <a:t>( 2 / 5 )</a:t>
             </a:r>
             <a:endParaRPr lang="vi-VN" sz="3600" b="1" dirty="0">
               <a:solidFill>
@@ -3773,13 +3702,6 @@
               </a:rPr>
               <a:t>得見此泉喜歡</a:t>
             </a:r>
-            <a:endParaRPr lang="zh-TW" altLang="en-US" sz="6600" b="1" dirty="0">
-              <a:solidFill>
-                <a:srgbClr val="000066"/>
-              </a:solidFill>
-              <a:latin typeface="微軟正黑體" pitchFamily="34" charset="-120"/>
-              <a:ea typeface="微軟正黑體" pitchFamily="34" charset="-120"/>
-            </a:endParaRPr>
           </a:p>
         </p:txBody>
       </p:sp>
@@ -3996,39 +3918,7 @@
                   <a:srgbClr val="000066"/>
                 </a:solidFill>
               </a:rPr>
-              <a:t>( </a:t>
-            </a:r>
-            <a:r>
-              <a:rPr lang="en-US" sz="3600" b="1" dirty="0" smtClean="0">
-                <a:solidFill>
-                  <a:srgbClr val="000066"/>
-                </a:solidFill>
-              </a:rPr>
-              <a:t>2 </a:t>
-            </a:r>
-            <a:r>
-              <a:rPr lang="en-US" sz="3600" b="1" dirty="0" smtClean="0">
-                <a:solidFill>
-                  <a:srgbClr val="000066"/>
-                </a:solidFill>
-              </a:rPr>
-              <a:t>/ </a:t>
-            </a:r>
-            <a:r>
-              <a:rPr lang="en-US" sz="3600" b="1" dirty="0" smtClean="0">
-                <a:solidFill>
-                  <a:srgbClr val="000066"/>
-                </a:solidFill>
-              </a:rPr>
-              <a:t>5 </a:t>
-            </a:r>
-            <a:r>
-              <a:rPr lang="en-US" sz="3600" b="1" dirty="0" smtClean="0">
-                <a:solidFill>
-                  <a:srgbClr val="000066"/>
-                </a:solidFill>
-              </a:rPr>
-              <a:t>)</a:t>
+              <a:t>( 2 / 5 )</a:t>
             </a:r>
             <a:endParaRPr lang="vi-VN" sz="3600" b="1" dirty="0">
               <a:solidFill>
@@ -4326,39 +4216,7 @@
                   <a:srgbClr val="000066"/>
                 </a:solidFill>
               </a:rPr>
-              <a:t>( </a:t>
-            </a:r>
-            <a:r>
-              <a:rPr lang="en-US" sz="3600" b="1" dirty="0" smtClean="0">
-                <a:solidFill>
-                  <a:srgbClr val="000066"/>
-                </a:solidFill>
-              </a:rPr>
-              <a:t>2 </a:t>
-            </a:r>
-            <a:r>
-              <a:rPr lang="en-US" sz="3600" b="1" dirty="0" smtClean="0">
-                <a:solidFill>
-                  <a:srgbClr val="000066"/>
-                </a:solidFill>
-              </a:rPr>
-              <a:t>/ </a:t>
-            </a:r>
-            <a:r>
-              <a:rPr lang="en-US" sz="3600" b="1" dirty="0" smtClean="0">
-                <a:solidFill>
-                  <a:srgbClr val="000066"/>
-                </a:solidFill>
-              </a:rPr>
-              <a:t>5 </a:t>
-            </a:r>
-            <a:r>
-              <a:rPr lang="en-US" sz="3600" b="1" dirty="0" smtClean="0">
-                <a:solidFill>
-                  <a:srgbClr val="000066"/>
-                </a:solidFill>
-              </a:rPr>
-              <a:t>)</a:t>
+              <a:t>( 2 / 5 )</a:t>
             </a:r>
             <a:endParaRPr lang="vi-VN" sz="3600" b="1" dirty="0">
               <a:solidFill>
@@ -4656,39 +4514,7 @@
                   <a:srgbClr val="000066"/>
                 </a:solidFill>
               </a:rPr>
-              <a:t>( </a:t>
-            </a:r>
-            <a:r>
-              <a:rPr lang="en-US" sz="3600" b="1" dirty="0" smtClean="0">
-                <a:solidFill>
-                  <a:srgbClr val="000066"/>
-                </a:solidFill>
-              </a:rPr>
-              <a:t>2 </a:t>
-            </a:r>
-            <a:r>
-              <a:rPr lang="en-US" sz="3600" b="1" dirty="0" smtClean="0">
-                <a:solidFill>
-                  <a:srgbClr val="000066"/>
-                </a:solidFill>
-              </a:rPr>
-              <a:t>/ </a:t>
-            </a:r>
-            <a:r>
-              <a:rPr lang="en-US" sz="3600" b="1" dirty="0" smtClean="0">
-                <a:solidFill>
-                  <a:srgbClr val="000066"/>
-                </a:solidFill>
-              </a:rPr>
-              <a:t>5 </a:t>
-            </a:r>
-            <a:r>
-              <a:rPr lang="en-US" sz="3600" b="1" dirty="0" smtClean="0">
-                <a:solidFill>
-                  <a:srgbClr val="000066"/>
-                </a:solidFill>
-              </a:rPr>
-              <a:t>)</a:t>
+              <a:t>( 2 / 5 )</a:t>
             </a:r>
             <a:endParaRPr lang="vi-VN" sz="3600" b="1" dirty="0">
               <a:solidFill>
@@ -4761,35 +4587,8 @@
                 <a:latin typeface="微軟正黑體" pitchFamily="34" charset="-120"/>
                 <a:ea typeface="微軟正黑體" pitchFamily="34" charset="-120"/>
               </a:rPr>
-              <a:t>我心相</a:t>
-            </a:r>
-            <a:r>
-              <a:rPr lang="zh-TW" altLang="en-US" sz="6600" b="1" dirty="0" smtClean="0">
-                <a:solidFill>
-                  <a:srgbClr val="000066"/>
-                </a:solidFill>
-                <a:latin typeface="微軟正黑體" pitchFamily="34" charset="-120"/>
-                <a:ea typeface="微軟正黑體" pitchFamily="34" charset="-120"/>
-              </a:rPr>
-              <a:t>信  我</a:t>
-            </a:r>
-            <a:r>
-              <a:rPr lang="zh-TW" altLang="en-US" sz="6600" b="1" dirty="0">
-                <a:solidFill>
-                  <a:srgbClr val="000066"/>
-                </a:solidFill>
-                <a:latin typeface="微軟正黑體" pitchFamily="34" charset="-120"/>
-                <a:ea typeface="微軟正黑體" pitchFamily="34" charset="-120"/>
-              </a:rPr>
-              <a:t>真相信</a:t>
-            </a:r>
-            <a:endParaRPr lang="zh-TW" altLang="en-US" sz="6600" b="1" dirty="0">
-              <a:solidFill>
-                <a:srgbClr val="000066"/>
-              </a:solidFill>
-              <a:latin typeface="微軟正黑體" pitchFamily="34" charset="-120"/>
-              <a:ea typeface="微軟正黑體" pitchFamily="34" charset="-120"/>
-            </a:endParaRPr>
+              <a:t>我心相信  我真相信</a:t>
+            </a:r>
           </a:p>
         </p:txBody>
       </p:sp>
@@ -5001,7 +4800,7 @@
           <a:p>
             <a:pPr algn="ctr"/>
             <a:r>
-              <a:rPr lang="en-US" sz="3600" b="1" dirty="0" smtClean="0">
+              <a:rPr lang="en-US" sz="3600" b="1" dirty="0">
                 <a:solidFill>
                   <a:srgbClr val="000066"/>
                 </a:solidFill>
@@ -5081,13 +4880,6 @@
               </a:rPr>
               <a:t>耶穌替我受害</a:t>
             </a:r>
-            <a:endParaRPr lang="zh-TW" altLang="en-US" sz="6600" b="1" dirty="0">
-              <a:solidFill>
-                <a:srgbClr val="000066"/>
-              </a:solidFill>
-              <a:latin typeface="微軟正黑體" pitchFamily="34" charset="-120"/>
-              <a:ea typeface="微軟正黑體" pitchFamily="34" charset="-120"/>
-            </a:endParaRPr>
           </a:p>
         </p:txBody>
       </p:sp>
@@ -5299,7 +5091,7 @@
           <a:p>
             <a:pPr algn="ctr"/>
             <a:r>
-              <a:rPr lang="en-US" sz="3600" b="1" dirty="0" smtClean="0">
+              <a:rPr lang="en-US" sz="3600" b="1" dirty="0">
                 <a:solidFill>
                   <a:srgbClr val="000066"/>
                 </a:solidFill>
@@ -5379,13 +5171,6 @@
               </a:rPr>
               <a:t>天父愛子這樣受死</a:t>
             </a:r>
-            <a:endParaRPr lang="zh-TW" altLang="en-US" sz="6600" b="1" dirty="0">
-              <a:solidFill>
-                <a:srgbClr val="000066"/>
-              </a:solidFill>
-              <a:latin typeface="微軟正黑體" pitchFamily="34" charset="-120"/>
-              <a:ea typeface="微軟正黑體" pitchFamily="34" charset="-120"/>
-            </a:endParaRPr>
           </a:p>
         </p:txBody>
       </p:sp>
@@ -5597,7 +5382,7 @@
           <a:p>
             <a:pPr algn="ctr"/>
             <a:r>
-              <a:rPr lang="en-US" sz="3600" b="1" dirty="0" smtClean="0">
+              <a:rPr lang="en-US" sz="3600" b="1" dirty="0">
                 <a:solidFill>
                   <a:srgbClr val="000066"/>
                 </a:solidFill>
@@ -5677,13 +5462,6 @@
               </a:rPr>
               <a:t>焚身難報主愛</a:t>
             </a:r>
-            <a:endParaRPr lang="zh-TW" altLang="en-US" sz="6600" b="1" dirty="0">
-              <a:solidFill>
-                <a:srgbClr val="000066"/>
-              </a:solidFill>
-              <a:latin typeface="微軟正黑體" pitchFamily="34" charset="-120"/>
-              <a:ea typeface="微軟正黑體" pitchFamily="34" charset="-120"/>
-            </a:endParaRPr>
           </a:p>
         </p:txBody>
       </p:sp>
@@ -5895,7 +5673,7 @@
           <a:p>
             <a:pPr algn="ctr"/>
             <a:r>
-              <a:rPr lang="en-US" sz="3600" b="1" dirty="0" smtClean="0">
+              <a:rPr lang="en-US" sz="3600" b="1" dirty="0">
                 <a:solidFill>
                   <a:srgbClr val="000066"/>
                 </a:solidFill>
@@ -5975,13 +5753,6 @@
               </a:rPr>
               <a:t>親愛救主祢寶貝血</a:t>
             </a:r>
-            <a:endParaRPr lang="zh-TW" altLang="en-US" sz="6600" b="1" dirty="0">
-              <a:solidFill>
-                <a:srgbClr val="000066"/>
-              </a:solidFill>
-              <a:latin typeface="微軟正黑體" pitchFamily="34" charset="-120"/>
-              <a:ea typeface="微軟正黑體" pitchFamily="34" charset="-120"/>
-            </a:endParaRPr>
           </a:p>
         </p:txBody>
       </p:sp>
@@ -6193,7 +5964,7 @@
           <a:p>
             <a:pPr algn="ctr"/>
             <a:r>
-              <a:rPr lang="en-US" sz="3600" b="1" dirty="0" smtClean="0">
+              <a:rPr lang="en-US" sz="3600" b="1" dirty="0">
                 <a:solidFill>
                   <a:srgbClr val="000066"/>
                 </a:solidFill>
@@ -6273,13 +6044,6 @@
               </a:rPr>
               <a:t>永世不會失效</a:t>
             </a:r>
-            <a:endParaRPr lang="zh-TW" altLang="en-US" sz="6600" b="1" dirty="0">
-              <a:solidFill>
-                <a:srgbClr val="000066"/>
-              </a:solidFill>
-              <a:latin typeface="微軟正黑體" pitchFamily="34" charset="-120"/>
-              <a:ea typeface="微軟正黑體" pitchFamily="34" charset="-120"/>
-            </a:endParaRPr>
           </a:p>
         </p:txBody>
       </p:sp>
@@ -6491,7 +6255,7 @@
           <a:p>
             <a:pPr algn="ctr"/>
             <a:r>
-              <a:rPr lang="en-US" sz="3600" b="1" dirty="0" smtClean="0">
+              <a:rPr lang="en-US" sz="3600" b="1" dirty="0">
                 <a:solidFill>
                   <a:srgbClr val="000066"/>
                 </a:solidFill>
@@ -6562,24 +6326,14 @@
               <a:buNone/>
             </a:pPr>
             <a:r>
-              <a:rPr lang="zh-CN" altLang="en-US" sz="6600" b="1" dirty="0" smtClean="0">
+              <a:rPr lang="zh-CN" altLang="en-US" sz="6600" b="1" dirty="0">
                 <a:solidFill>
                   <a:srgbClr val="000066"/>
                 </a:solidFill>
                 <a:latin typeface="微軟正黑體" pitchFamily="34" charset="-120"/>
                 <a:ea typeface="微軟正黑體" pitchFamily="34" charset="-120"/>
               </a:rPr>
-              <a:t>今</a:t>
-            </a:r>
-            <a:r>
-              <a:rPr lang="zh-CN" altLang="en-US" sz="6600" b="1" dirty="0">
-                <a:solidFill>
-                  <a:srgbClr val="000066"/>
-                </a:solidFill>
-                <a:latin typeface="微軟正黑體" pitchFamily="34" charset="-120"/>
-                <a:ea typeface="微軟正黑體" pitchFamily="34" charset="-120"/>
-              </a:rPr>
-              <a:t>有一處流血之泉</a:t>
+              <a:t>今有一處流血之泉</a:t>
             </a:r>
             <a:endParaRPr lang="en-US" altLang="zh-TW" sz="6400" b="1" dirty="0">
               <a:solidFill>
@@ -6754,7 +6508,7 @@
               <a:buNone/>
             </a:pPr>
             <a:r>
-              <a:rPr lang="vi-VN" sz="4400" b="1" dirty="0" smtClean="0">
+              <a:rPr lang="vi-VN" sz="4400" b="1" dirty="0">
                 <a:solidFill>
                   <a:srgbClr val="660033"/>
                 </a:solidFill>
@@ -6762,18 +6516,7 @@
                 <a:ea typeface="微軟正黑體" pitchFamily="34" charset="-120"/>
                 <a:cs typeface="Calibri" panose="020F0502020204030204" pitchFamily="34" charset="0"/>
               </a:rPr>
-              <a:t>Kìa</a:t>
-            </a:r>
-            <a:r>
-              <a:rPr lang="vi-VN" sz="4400" b="1" dirty="0">
-                <a:solidFill>
-                  <a:srgbClr val="660033"/>
-                </a:solidFill>
-                <a:latin typeface="Calibri" panose="020F0502020204030204" pitchFamily="34" charset="0"/>
-                <a:ea typeface="微軟正黑體" pitchFamily="34" charset="-120"/>
-                <a:cs typeface="Calibri" panose="020F0502020204030204" pitchFamily="34" charset="0"/>
-              </a:rPr>
-              <a:t>, trông suối thiêng huyết báu tuôn đầy</a:t>
+              <a:t>Kìa, trông suối thiêng huyết báu tuôn đầy</a:t>
             </a:r>
             <a:endParaRPr lang="en-US" sz="4400" b="1" dirty="0">
               <a:solidFill>
@@ -6815,31 +6558,7 @@
                   <a:srgbClr val="000066"/>
                 </a:solidFill>
               </a:rPr>
-              <a:t>( 1 </a:t>
-            </a:r>
-            <a:r>
-              <a:rPr lang="en-US" sz="3600" b="1" dirty="0" smtClean="0">
-                <a:solidFill>
-                  <a:srgbClr val="000066"/>
-                </a:solidFill>
-              </a:rPr>
-              <a:t>/ </a:t>
-            </a:r>
-            <a:r>
-              <a:rPr lang="en-US" sz="3600" b="1" dirty="0" smtClean="0">
-                <a:solidFill>
-                  <a:srgbClr val="000066"/>
-                </a:solidFill>
-              </a:rPr>
-              <a:t>5 </a:t>
-            </a:r>
-            <a:r>
-              <a:rPr lang="en-US" sz="3600" b="1" dirty="0" smtClean="0">
-                <a:solidFill>
-                  <a:srgbClr val="000066"/>
-                </a:solidFill>
-              </a:rPr>
-              <a:t>)</a:t>
+              <a:t>( 1 / 5 )</a:t>
             </a:r>
             <a:endParaRPr lang="vi-VN" sz="3600" b="1" dirty="0">
               <a:solidFill>
@@ -6914,13 +6633,6 @@
               </a:rPr>
               <a:t>直到天父救贖眾民</a:t>
             </a:r>
-            <a:endParaRPr lang="zh-TW" altLang="en-US" sz="6600" b="1" dirty="0">
-              <a:solidFill>
-                <a:srgbClr val="000066"/>
-              </a:solidFill>
-              <a:latin typeface="微軟正黑體" pitchFamily="34" charset="-120"/>
-              <a:ea typeface="微軟正黑體" pitchFamily="34" charset="-120"/>
-            </a:endParaRPr>
           </a:p>
         </p:txBody>
       </p:sp>
@@ -7132,7 +6844,7 @@
           <a:p>
             <a:pPr algn="ctr"/>
             <a:r>
-              <a:rPr lang="en-US" sz="3600" b="1" dirty="0" smtClean="0">
+              <a:rPr lang="en-US" sz="3600" b="1" dirty="0">
                 <a:solidFill>
                   <a:srgbClr val="000066"/>
                 </a:solidFill>
@@ -7212,13 +6924,6 @@
               </a:rPr>
               <a:t>罪惡一概洗掉</a:t>
             </a:r>
-            <a:endParaRPr lang="zh-TW" altLang="en-US" sz="6600" b="1" dirty="0">
-              <a:solidFill>
-                <a:srgbClr val="000066"/>
-              </a:solidFill>
-              <a:latin typeface="微軟正黑體" pitchFamily="34" charset="-120"/>
-              <a:ea typeface="微軟正黑體" pitchFamily="34" charset="-120"/>
-            </a:endParaRPr>
           </a:p>
         </p:txBody>
       </p:sp>
@@ -7430,7 +7135,7 @@
           <a:p>
             <a:pPr algn="ctr"/>
             <a:r>
-              <a:rPr lang="en-US" sz="3600" b="1" dirty="0" smtClean="0">
+              <a:rPr lang="en-US" sz="3600" b="1" dirty="0">
                 <a:solidFill>
                   <a:srgbClr val="000066"/>
                 </a:solidFill>
@@ -7508,35 +7213,8 @@
                 <a:latin typeface="微軟正黑體" pitchFamily="34" charset="-120"/>
                 <a:ea typeface="微軟正黑體" pitchFamily="34" charset="-120"/>
               </a:rPr>
-              <a:t>我心相</a:t>
-            </a:r>
-            <a:r>
-              <a:rPr lang="zh-TW" altLang="en-US" sz="6600" b="1" dirty="0" smtClean="0">
-                <a:solidFill>
-                  <a:srgbClr val="000066"/>
-                </a:solidFill>
-                <a:latin typeface="微軟正黑體" pitchFamily="34" charset="-120"/>
-                <a:ea typeface="微軟正黑體" pitchFamily="34" charset="-120"/>
-              </a:rPr>
-              <a:t>信  我</a:t>
-            </a:r>
-            <a:r>
-              <a:rPr lang="zh-TW" altLang="en-US" sz="6600" b="1" dirty="0">
-                <a:solidFill>
-                  <a:srgbClr val="000066"/>
-                </a:solidFill>
-                <a:latin typeface="微軟正黑體" pitchFamily="34" charset="-120"/>
-                <a:ea typeface="微軟正黑體" pitchFamily="34" charset="-120"/>
-              </a:rPr>
-              <a:t>真相信</a:t>
-            </a:r>
-            <a:endParaRPr lang="zh-TW" altLang="en-US" sz="6600" b="1" dirty="0">
-              <a:solidFill>
-                <a:srgbClr val="000066"/>
-              </a:solidFill>
-              <a:latin typeface="微軟正黑體" pitchFamily="34" charset="-120"/>
-              <a:ea typeface="微軟正黑體" pitchFamily="34" charset="-120"/>
-            </a:endParaRPr>
+              <a:t>我心相信  我真相信</a:t>
+            </a:r>
           </a:p>
         </p:txBody>
       </p:sp>
@@ -7748,7 +7426,7 @@
           <a:p>
             <a:pPr algn="ctr"/>
             <a:r>
-              <a:rPr lang="en-US" sz="3600" b="1" dirty="0" smtClean="0">
+              <a:rPr lang="en-US" sz="3600" b="1" dirty="0">
                 <a:solidFill>
                   <a:srgbClr val="000066"/>
                 </a:solidFill>
@@ -7828,13 +7506,6 @@
               </a:rPr>
               <a:t>耶穌替我受害</a:t>
             </a:r>
-            <a:endParaRPr lang="zh-TW" altLang="en-US" sz="6600" b="1" dirty="0">
-              <a:solidFill>
-                <a:srgbClr val="000066"/>
-              </a:solidFill>
-              <a:latin typeface="微軟正黑體" pitchFamily="34" charset="-120"/>
-              <a:ea typeface="微軟正黑體" pitchFamily="34" charset="-120"/>
-            </a:endParaRPr>
           </a:p>
         </p:txBody>
       </p:sp>
@@ -8009,18 +7680,7 @@
                 <a:ea typeface="微軟正黑體" pitchFamily="34" charset="-120"/>
                 <a:cs typeface="Calibri" panose="020F0502020204030204" pitchFamily="34" charset="0"/>
               </a:rPr>
-              <a:t>Ác khiên khôn nhiễm gì </a:t>
-            </a:r>
-            <a:r>
-              <a:rPr lang="vi-VN" sz="4400" b="1" dirty="0">
-                <a:solidFill>
-                  <a:srgbClr val="660033"/>
-                </a:solidFill>
-                <a:latin typeface="Calibri" panose="020F0502020204030204" pitchFamily="34" charset="0"/>
-                <a:ea typeface="微軟正黑體" pitchFamily="34" charset="-120"/>
-                <a:cs typeface="Calibri" panose="020F0502020204030204" pitchFamily="34" charset="0"/>
-              </a:rPr>
-              <a:t>được</a:t>
+              <a:t>Ác khiên khôn nhiễm gì được</a:t>
             </a:r>
             <a:endParaRPr lang="en-US" sz="4400" b="1" dirty="0">
               <a:solidFill>
@@ -8057,7 +7717,7 @@
           <a:p>
             <a:pPr algn="ctr"/>
             <a:r>
-              <a:rPr lang="en-US" sz="3600" b="1" dirty="0" smtClean="0">
+              <a:rPr lang="en-US" sz="3600" b="1" dirty="0">
                 <a:solidFill>
                   <a:srgbClr val="000066"/>
                 </a:solidFill>
@@ -8137,13 +7797,6 @@
               </a:rPr>
               <a:t>天父愛子這樣受死</a:t>
             </a:r>
-            <a:endParaRPr lang="zh-TW" altLang="en-US" sz="6600" b="1" dirty="0">
-              <a:solidFill>
-                <a:srgbClr val="000066"/>
-              </a:solidFill>
-              <a:latin typeface="微軟正黑體" pitchFamily="34" charset="-120"/>
-              <a:ea typeface="微軟正黑體" pitchFamily="34" charset="-120"/>
-            </a:endParaRPr>
           </a:p>
         </p:txBody>
       </p:sp>
@@ -8355,7 +8008,7 @@
           <a:p>
             <a:pPr algn="ctr"/>
             <a:r>
-              <a:rPr lang="en-US" sz="3600" b="1" dirty="0" smtClean="0">
+              <a:rPr lang="en-US" sz="3600" b="1" dirty="0">
                 <a:solidFill>
                   <a:srgbClr val="000066"/>
                 </a:solidFill>
@@ -8435,13 +8088,6 @@
               </a:rPr>
               <a:t>焚身難報主愛</a:t>
             </a:r>
-            <a:endParaRPr lang="zh-TW" altLang="en-US" sz="6600" b="1" dirty="0">
-              <a:solidFill>
-                <a:srgbClr val="000066"/>
-              </a:solidFill>
-              <a:latin typeface="微軟正黑體" pitchFamily="34" charset="-120"/>
-              <a:ea typeface="微軟正黑體" pitchFamily="34" charset="-120"/>
-            </a:endParaRPr>
           </a:p>
         </p:txBody>
       </p:sp>
@@ -8653,7 +8299,7 @@
           <a:p>
             <a:pPr algn="ctr"/>
             <a:r>
-              <a:rPr lang="en-US" sz="3600" b="1" dirty="0" smtClean="0">
+              <a:rPr lang="en-US" sz="3600" b="1" dirty="0">
                 <a:solidFill>
                   <a:srgbClr val="000066"/>
                 </a:solidFill>
@@ -8733,13 +8379,6 @@
               </a:rPr>
               <a:t>自從一看主傷流血</a:t>
             </a:r>
-            <a:endParaRPr lang="zh-TW" altLang="en-US" sz="6600" b="1" dirty="0">
-              <a:solidFill>
-                <a:srgbClr val="000066"/>
-              </a:solidFill>
-              <a:latin typeface="微軟正黑體" pitchFamily="34" charset="-120"/>
-              <a:ea typeface="微軟正黑體" pitchFamily="34" charset="-120"/>
-            </a:endParaRPr>
           </a:p>
         </p:txBody>
       </p:sp>
@@ -8951,7 +8590,7 @@
           <a:p>
             <a:pPr algn="ctr"/>
             <a:r>
-              <a:rPr lang="en-US" sz="3600" b="1" dirty="0" smtClean="0">
+              <a:rPr lang="en-US" sz="3600" b="1" dirty="0">
                 <a:solidFill>
                   <a:srgbClr val="000066"/>
                 </a:solidFill>
@@ -9031,13 +8670,6 @@
               </a:rPr>
               <a:t>成這贖罪泉源</a:t>
             </a:r>
-            <a:endParaRPr lang="zh-TW" altLang="en-US" sz="6600" b="1" dirty="0">
-              <a:solidFill>
-                <a:srgbClr val="000066"/>
-              </a:solidFill>
-              <a:latin typeface="微軟正黑體" pitchFamily="34" charset="-120"/>
-              <a:ea typeface="微軟正黑體" pitchFamily="34" charset="-120"/>
-            </a:endParaRPr>
           </a:p>
         </p:txBody>
       </p:sp>
@@ -9249,7 +8881,7 @@
           <a:p>
             <a:pPr algn="ctr"/>
             <a:r>
-              <a:rPr lang="en-US" sz="3600" b="1" dirty="0" smtClean="0">
+              <a:rPr lang="en-US" sz="3600" b="1" dirty="0">
                 <a:solidFill>
                   <a:srgbClr val="000066"/>
                 </a:solidFill>
@@ -9329,13 +8961,6 @@
               </a:rPr>
               <a:t>贖罪妙恩我常傳揚</a:t>
             </a:r>
-            <a:endParaRPr lang="zh-TW" altLang="en-US" sz="6600" b="1" dirty="0">
-              <a:solidFill>
-                <a:srgbClr val="000066"/>
-              </a:solidFill>
-              <a:latin typeface="微軟正黑體" pitchFamily="34" charset="-120"/>
-              <a:ea typeface="微軟正黑體" pitchFamily="34" charset="-120"/>
-            </a:endParaRPr>
           </a:p>
         </p:txBody>
       </p:sp>
@@ -9547,7 +9172,7 @@
           <a:p>
             <a:pPr algn="ctr"/>
             <a:r>
-              <a:rPr lang="en-US" sz="3600" b="1" dirty="0" smtClean="0">
+              <a:rPr lang="en-US" sz="3600" b="1" dirty="0">
                 <a:solidFill>
                   <a:srgbClr val="000066"/>
                 </a:solidFill>
@@ -9627,13 +9252,6 @@
               </a:rPr>
               <a:t>至死仍然要傳</a:t>
             </a:r>
-            <a:endParaRPr lang="zh-TW" altLang="en-US" sz="6600" b="1" dirty="0">
-              <a:solidFill>
-                <a:srgbClr val="000066"/>
-              </a:solidFill>
-              <a:latin typeface="微軟正黑體" pitchFamily="34" charset="-120"/>
-              <a:ea typeface="微軟正黑體" pitchFamily="34" charset="-120"/>
-            </a:endParaRPr>
           </a:p>
         </p:txBody>
       </p:sp>
@@ -9845,7 +9463,7 @@
           <a:p>
             <a:pPr algn="ctr"/>
             <a:r>
-              <a:rPr lang="en-US" sz="3600" b="1" dirty="0" smtClean="0">
+              <a:rPr lang="en-US" sz="3600" b="1" dirty="0">
                 <a:solidFill>
                   <a:srgbClr val="000066"/>
                 </a:solidFill>
@@ -9925,13 +9543,6 @@
               </a:rPr>
               <a:t>從耶穌身發源</a:t>
             </a:r>
-            <a:endParaRPr lang="zh-TW" altLang="en-US" sz="6600" b="1" dirty="0">
-              <a:solidFill>
-                <a:srgbClr val="000066"/>
-              </a:solidFill>
-              <a:latin typeface="微軟正黑體" pitchFamily="34" charset="-120"/>
-              <a:ea typeface="微軟正黑體" pitchFamily="34" charset="-120"/>
-            </a:endParaRPr>
           </a:p>
         </p:txBody>
       </p:sp>
@@ -10148,31 +9759,7 @@
                   <a:srgbClr val="000066"/>
                 </a:solidFill>
               </a:rPr>
-              <a:t>( 1 </a:t>
-            </a:r>
-            <a:r>
-              <a:rPr lang="en-US" sz="3600" b="1" dirty="0" smtClean="0">
-                <a:solidFill>
-                  <a:srgbClr val="000066"/>
-                </a:solidFill>
-              </a:rPr>
-              <a:t>/ </a:t>
-            </a:r>
-            <a:r>
-              <a:rPr lang="en-US" sz="3600" b="1" dirty="0" smtClean="0">
-                <a:solidFill>
-                  <a:srgbClr val="000066"/>
-                </a:solidFill>
-              </a:rPr>
-              <a:t>5 </a:t>
-            </a:r>
-            <a:r>
-              <a:rPr lang="en-US" sz="3600" b="1" dirty="0" smtClean="0">
-                <a:solidFill>
-                  <a:srgbClr val="000066"/>
-                </a:solidFill>
-              </a:rPr>
-              <a:t>)</a:t>
+              <a:t>( 1 / 5 )</a:t>
             </a:r>
             <a:endParaRPr lang="vi-VN" sz="3600" b="1" dirty="0">
               <a:solidFill>
@@ -10245,35 +9832,8 @@
                 <a:latin typeface="微軟正黑體" pitchFamily="34" charset="-120"/>
                 <a:ea typeface="微軟正黑體" pitchFamily="34" charset="-120"/>
               </a:rPr>
-              <a:t>我心相</a:t>
-            </a:r>
-            <a:r>
-              <a:rPr lang="zh-TW" altLang="en-US" sz="6600" b="1" dirty="0" smtClean="0">
-                <a:solidFill>
-                  <a:srgbClr val="000066"/>
-                </a:solidFill>
-                <a:latin typeface="微軟正黑體" pitchFamily="34" charset="-120"/>
-                <a:ea typeface="微軟正黑體" pitchFamily="34" charset="-120"/>
-              </a:rPr>
-              <a:t>信  我</a:t>
-            </a:r>
-            <a:r>
-              <a:rPr lang="zh-TW" altLang="en-US" sz="6600" b="1" dirty="0">
-                <a:solidFill>
-                  <a:srgbClr val="000066"/>
-                </a:solidFill>
-                <a:latin typeface="微軟正黑體" pitchFamily="34" charset="-120"/>
-                <a:ea typeface="微軟正黑體" pitchFamily="34" charset="-120"/>
-              </a:rPr>
-              <a:t>真相信</a:t>
-            </a:r>
-            <a:endParaRPr lang="zh-TW" altLang="en-US" sz="6600" b="1" dirty="0">
-              <a:solidFill>
-                <a:srgbClr val="000066"/>
-              </a:solidFill>
-              <a:latin typeface="微軟正黑體" pitchFamily="34" charset="-120"/>
-              <a:ea typeface="微軟正黑體" pitchFamily="34" charset="-120"/>
-            </a:endParaRPr>
+              <a:t>我心相信  我真相信</a:t>
+            </a:r>
           </a:p>
         </p:txBody>
       </p:sp>
@@ -10485,7 +10045,7 @@
           <a:p>
             <a:pPr algn="ctr"/>
             <a:r>
-              <a:rPr lang="en-US" sz="3600" b="1" dirty="0" smtClean="0">
+              <a:rPr lang="en-US" sz="3600" b="1" dirty="0">
                 <a:solidFill>
                   <a:srgbClr val="000066"/>
                 </a:solidFill>
@@ -10565,13 +10125,6 @@
               </a:rPr>
               <a:t>耶穌替我受害</a:t>
             </a:r>
-            <a:endParaRPr lang="zh-TW" altLang="en-US" sz="6600" b="1" dirty="0">
-              <a:solidFill>
-                <a:srgbClr val="000066"/>
-              </a:solidFill>
-              <a:latin typeface="微軟正黑體" pitchFamily="34" charset="-120"/>
-              <a:ea typeface="微軟正黑體" pitchFamily="34" charset="-120"/>
-            </a:endParaRPr>
           </a:p>
         </p:txBody>
       </p:sp>
@@ -10783,7 +10336,7 @@
           <a:p>
             <a:pPr algn="ctr"/>
             <a:r>
-              <a:rPr lang="en-US" sz="3600" b="1" dirty="0" smtClean="0">
+              <a:rPr lang="en-US" sz="3600" b="1" dirty="0">
                 <a:solidFill>
                   <a:srgbClr val="000066"/>
                 </a:solidFill>
@@ -10863,13 +10416,6 @@
               </a:rPr>
               <a:t>天父愛子這樣受死</a:t>
             </a:r>
-            <a:endParaRPr lang="zh-TW" altLang="en-US" sz="6600" b="1" dirty="0">
-              <a:solidFill>
-                <a:srgbClr val="000066"/>
-              </a:solidFill>
-              <a:latin typeface="微軟正黑體" pitchFamily="34" charset="-120"/>
-              <a:ea typeface="微軟正黑體" pitchFamily="34" charset="-120"/>
-            </a:endParaRPr>
           </a:p>
         </p:txBody>
       </p:sp>
@@ -11081,7 +10627,7 @@
           <a:p>
             <a:pPr algn="ctr"/>
             <a:r>
-              <a:rPr lang="en-US" sz="3600" b="1" dirty="0" smtClean="0">
+              <a:rPr lang="en-US" sz="3600" b="1" dirty="0">
                 <a:solidFill>
                   <a:srgbClr val="000066"/>
                 </a:solidFill>
@@ -11161,13 +10707,6 @@
               </a:rPr>
               <a:t>焚身難報主愛</a:t>
             </a:r>
-            <a:endParaRPr lang="zh-TW" altLang="en-US" sz="6600" b="1" dirty="0">
-              <a:solidFill>
-                <a:srgbClr val="000066"/>
-              </a:solidFill>
-              <a:latin typeface="微軟正黑體" pitchFamily="34" charset="-120"/>
-              <a:ea typeface="微軟正黑體" pitchFamily="34" charset="-120"/>
-            </a:endParaRPr>
           </a:p>
         </p:txBody>
       </p:sp>
@@ -11379,7 +10918,7 @@
           <a:p>
             <a:pPr algn="ctr"/>
             <a:r>
-              <a:rPr lang="en-US" sz="3600" b="1" dirty="0" smtClean="0">
+              <a:rPr lang="en-US" sz="3600" b="1" dirty="0">
                 <a:solidFill>
                   <a:srgbClr val="000066"/>
                 </a:solidFill>
@@ -11677,7 +11216,7 @@
           <a:p>
             <a:pPr algn="ctr"/>
             <a:r>
-              <a:rPr lang="en-US" sz="3600" b="1" dirty="0" smtClean="0">
+              <a:rPr lang="en-US" sz="3600" b="1" dirty="0">
                 <a:solidFill>
                   <a:srgbClr val="000066"/>
                 </a:solidFill>
@@ -11757,13 +11296,6 @@
               </a:rPr>
               <a:t>無聲在墳墓中</a:t>
             </a:r>
-            <a:endParaRPr lang="zh-TW" altLang="en-US" sz="6600" b="1" dirty="0">
-              <a:solidFill>
-                <a:srgbClr val="000066"/>
-              </a:solidFill>
-              <a:latin typeface="微軟正黑體" pitchFamily="34" charset="-120"/>
-              <a:ea typeface="微軟正黑體" pitchFamily="34" charset="-120"/>
-            </a:endParaRPr>
           </a:p>
         </p:txBody>
       </p:sp>
@@ -11975,7 +11507,7 @@
           <a:p>
             <a:pPr algn="ctr"/>
             <a:r>
-              <a:rPr lang="en-US" sz="3600" b="1" dirty="0" smtClean="0">
+              <a:rPr lang="en-US" sz="3600" b="1" dirty="0">
                 <a:solidFill>
                   <a:srgbClr val="000066"/>
                 </a:solidFill>
@@ -12055,13 +11587,6 @@
               </a:rPr>
               <a:t>在天還要歌聲更美</a:t>
             </a:r>
-            <a:endParaRPr lang="zh-TW" altLang="en-US" sz="6600" b="1" dirty="0">
-              <a:solidFill>
-                <a:srgbClr val="000066"/>
-              </a:solidFill>
-              <a:latin typeface="微軟正黑體" pitchFamily="34" charset="-120"/>
-              <a:ea typeface="微軟正黑體" pitchFamily="34" charset="-120"/>
-            </a:endParaRPr>
           </a:p>
         </p:txBody>
       </p:sp>
@@ -12273,7 +11798,7 @@
           <a:p>
             <a:pPr algn="ctr"/>
             <a:r>
-              <a:rPr lang="en-US" sz="3600" b="1" dirty="0" smtClean="0">
+              <a:rPr lang="en-US" sz="3600" b="1" dirty="0">
                 <a:solidFill>
                   <a:srgbClr val="000066"/>
                 </a:solidFill>
@@ -12534,18 +12059,7 @@
                 <a:ea typeface="微軟正黑體" pitchFamily="34" charset="-120"/>
                 <a:cs typeface="Calibri" panose="020F0502020204030204" pitchFamily="34" charset="0"/>
               </a:rPr>
-              <a:t>Hát khúc quyền năng huyết </a:t>
-            </a:r>
-            <a:r>
-              <a:rPr lang="vi-VN" sz="4400" b="1" dirty="0">
-                <a:solidFill>
-                  <a:srgbClr val="660033"/>
-                </a:solidFill>
-                <a:latin typeface="Calibri" panose="020F0502020204030204" pitchFamily="34" charset="0"/>
-                <a:ea typeface="微軟正黑體" pitchFamily="34" charset="-120"/>
-                <a:cs typeface="Calibri" panose="020F0502020204030204" pitchFamily="34" charset="0"/>
-              </a:rPr>
-              <a:t>Ngài</a:t>
+              <a:t>Hát khúc quyền năng huyết Ngài</a:t>
             </a:r>
             <a:endParaRPr lang="en-US" sz="4400" b="1" dirty="0">
               <a:solidFill>
@@ -12582,7 +12096,7 @@
           <a:p>
             <a:pPr algn="ctr"/>
             <a:r>
-              <a:rPr lang="en-US" sz="3600" b="1" dirty="0" smtClean="0">
+              <a:rPr lang="en-US" sz="3600" b="1" dirty="0">
                 <a:solidFill>
                   <a:srgbClr val="000066"/>
                 </a:solidFill>
@@ -12660,35 +12174,8 @@
                 <a:latin typeface="微軟正黑體" pitchFamily="34" charset="-120"/>
                 <a:ea typeface="微軟正黑體" pitchFamily="34" charset="-120"/>
               </a:rPr>
-              <a:t>我心相</a:t>
-            </a:r>
-            <a:r>
-              <a:rPr lang="zh-TW" altLang="en-US" sz="6600" b="1" dirty="0" smtClean="0">
-                <a:solidFill>
-                  <a:srgbClr val="000066"/>
-                </a:solidFill>
-                <a:latin typeface="微軟正黑體" pitchFamily="34" charset="-120"/>
-                <a:ea typeface="微軟正黑體" pitchFamily="34" charset="-120"/>
-              </a:rPr>
-              <a:t>信  我</a:t>
-            </a:r>
-            <a:r>
-              <a:rPr lang="zh-TW" altLang="en-US" sz="6600" b="1" dirty="0">
-                <a:solidFill>
-                  <a:srgbClr val="000066"/>
-                </a:solidFill>
-                <a:latin typeface="微軟正黑體" pitchFamily="34" charset="-120"/>
-                <a:ea typeface="微軟正黑體" pitchFamily="34" charset="-120"/>
-              </a:rPr>
-              <a:t>真相信</a:t>
-            </a:r>
-            <a:endParaRPr lang="zh-TW" altLang="en-US" sz="6600" b="1" dirty="0">
-              <a:solidFill>
-                <a:srgbClr val="000066"/>
-              </a:solidFill>
-              <a:latin typeface="微軟正黑體" pitchFamily="34" charset="-120"/>
-              <a:ea typeface="微軟正黑體" pitchFamily="34" charset="-120"/>
-            </a:endParaRPr>
+              <a:t>我心相信  我真相信</a:t>
+            </a:r>
           </a:p>
         </p:txBody>
       </p:sp>
@@ -12900,7 +12387,7 @@
           <a:p>
             <a:pPr algn="ctr"/>
             <a:r>
-              <a:rPr lang="en-US" sz="3600" b="1" dirty="0" smtClean="0">
+              <a:rPr lang="en-US" sz="3600" b="1" dirty="0">
                 <a:solidFill>
                   <a:srgbClr val="000066"/>
                 </a:solidFill>
@@ -12980,13 +12467,6 @@
               </a:rPr>
               <a:t>耶穌替我受害</a:t>
             </a:r>
-            <a:endParaRPr lang="zh-TW" altLang="en-US" sz="6600" b="1" dirty="0">
-              <a:solidFill>
-                <a:srgbClr val="000066"/>
-              </a:solidFill>
-              <a:latin typeface="微軟正黑體" pitchFamily="34" charset="-120"/>
-              <a:ea typeface="微軟正黑體" pitchFamily="34" charset="-120"/>
-            </a:endParaRPr>
           </a:p>
         </p:txBody>
       </p:sp>
@@ -13198,7 +12678,7 @@
           <a:p>
             <a:pPr algn="ctr"/>
             <a:r>
-              <a:rPr lang="en-US" sz="3600" b="1" dirty="0" smtClean="0">
+              <a:rPr lang="en-US" sz="3600" b="1" dirty="0">
                 <a:solidFill>
                   <a:srgbClr val="000066"/>
                 </a:solidFill>
@@ -13278,13 +12758,6 @@
               </a:rPr>
               <a:t>罪人只要在此一洗</a:t>
             </a:r>
-            <a:endParaRPr lang="zh-TW" altLang="en-US" sz="6600" b="1" dirty="0">
-              <a:solidFill>
-                <a:srgbClr val="000066"/>
-              </a:solidFill>
-              <a:latin typeface="微軟正黑體" pitchFamily="34" charset="-120"/>
-              <a:ea typeface="微軟正黑體" pitchFamily="34" charset="-120"/>
-            </a:endParaRPr>
           </a:p>
         </p:txBody>
       </p:sp>
@@ -13501,31 +12974,7 @@
                   <a:srgbClr val="000066"/>
                 </a:solidFill>
               </a:rPr>
-              <a:t>( 1 </a:t>
-            </a:r>
-            <a:r>
-              <a:rPr lang="en-US" sz="3600" b="1" dirty="0" smtClean="0">
-                <a:solidFill>
-                  <a:srgbClr val="000066"/>
-                </a:solidFill>
-              </a:rPr>
-              <a:t>/ </a:t>
-            </a:r>
-            <a:r>
-              <a:rPr lang="en-US" sz="3600" b="1" dirty="0" smtClean="0">
-                <a:solidFill>
-                  <a:srgbClr val="000066"/>
-                </a:solidFill>
-              </a:rPr>
-              <a:t>5 </a:t>
-            </a:r>
-            <a:r>
-              <a:rPr lang="en-US" sz="3600" b="1" dirty="0" smtClean="0">
-                <a:solidFill>
-                  <a:srgbClr val="000066"/>
-                </a:solidFill>
-              </a:rPr>
-              <a:t>)</a:t>
+              <a:t>( 1 / 5 )</a:t>
             </a:r>
             <a:endParaRPr lang="vi-VN" sz="3600" b="1" dirty="0">
               <a:solidFill>
@@ -13600,13 +13049,6 @@
               </a:rPr>
               <a:t>天父愛子這樣受死</a:t>
             </a:r>
-            <a:endParaRPr lang="zh-TW" altLang="en-US" sz="6600" b="1" dirty="0">
-              <a:solidFill>
-                <a:srgbClr val="000066"/>
-              </a:solidFill>
-              <a:latin typeface="微軟正黑體" pitchFamily="34" charset="-120"/>
-              <a:ea typeface="微軟正黑體" pitchFamily="34" charset="-120"/>
-            </a:endParaRPr>
           </a:p>
         </p:txBody>
       </p:sp>
@@ -13818,7 +13260,7 @@
           <a:p>
             <a:pPr algn="ctr"/>
             <a:r>
-              <a:rPr lang="en-US" sz="3600" b="1" dirty="0" smtClean="0">
+              <a:rPr lang="en-US" sz="3600" b="1" dirty="0">
                 <a:solidFill>
                   <a:srgbClr val="000066"/>
                 </a:solidFill>
@@ -13898,13 +13340,6 @@
               </a:rPr>
               <a:t>焚身難報主愛</a:t>
             </a:r>
-            <a:endParaRPr lang="zh-TW" altLang="en-US" sz="6600" b="1" dirty="0">
-              <a:solidFill>
-                <a:srgbClr val="000066"/>
-              </a:solidFill>
-              <a:latin typeface="微軟正黑體" pitchFamily="34" charset="-120"/>
-              <a:ea typeface="微軟正黑體" pitchFamily="34" charset="-120"/>
-            </a:endParaRPr>
           </a:p>
         </p:txBody>
       </p:sp>
@@ -14116,7 +13551,7 @@
           <a:p>
             <a:pPr algn="ctr"/>
             <a:r>
-              <a:rPr lang="en-US" sz="3600" b="1" dirty="0" smtClean="0">
+              <a:rPr lang="en-US" sz="3600" b="1" dirty="0">
                 <a:solidFill>
                   <a:srgbClr val="000066"/>
                 </a:solidFill>
@@ -14419,31 +13854,7 @@
                   <a:srgbClr val="000066"/>
                 </a:solidFill>
               </a:rPr>
-              <a:t>( 1 </a:t>
-            </a:r>
-            <a:r>
-              <a:rPr lang="en-US" sz="3600" b="1" dirty="0" smtClean="0">
-                <a:solidFill>
-                  <a:srgbClr val="000066"/>
-                </a:solidFill>
-              </a:rPr>
-              <a:t>/ </a:t>
-            </a:r>
-            <a:r>
-              <a:rPr lang="en-US" sz="3600" b="1" dirty="0" smtClean="0">
-                <a:solidFill>
-                  <a:srgbClr val="000066"/>
-                </a:solidFill>
-              </a:rPr>
-              <a:t>5 </a:t>
-            </a:r>
-            <a:r>
-              <a:rPr lang="en-US" sz="3600" b="1" dirty="0" smtClean="0">
-                <a:solidFill>
-                  <a:srgbClr val="000066"/>
-                </a:solidFill>
-              </a:rPr>
-              <a:t>)</a:t>
+              <a:t>( 1 / 5 )</a:t>
             </a:r>
             <a:endParaRPr lang="vi-VN" sz="3600" b="1" dirty="0">
               <a:solidFill>
@@ -14516,35 +13927,8 @@
                 <a:latin typeface="微軟正黑體" pitchFamily="34" charset="-120"/>
                 <a:ea typeface="微軟正黑體" pitchFamily="34" charset="-120"/>
               </a:rPr>
-              <a:t>我心相</a:t>
-            </a:r>
-            <a:r>
-              <a:rPr lang="zh-TW" altLang="en-US" sz="6600" b="1" dirty="0" smtClean="0">
-                <a:solidFill>
-                  <a:srgbClr val="000066"/>
-                </a:solidFill>
-                <a:latin typeface="微軟正黑體" pitchFamily="34" charset="-120"/>
-                <a:ea typeface="微軟正黑體" pitchFamily="34" charset="-120"/>
-              </a:rPr>
-              <a:t>信  我</a:t>
-            </a:r>
-            <a:r>
-              <a:rPr lang="zh-TW" altLang="en-US" sz="6600" b="1" dirty="0">
-                <a:solidFill>
-                  <a:srgbClr val="000066"/>
-                </a:solidFill>
-                <a:latin typeface="微軟正黑體" pitchFamily="34" charset="-120"/>
-                <a:ea typeface="微軟正黑體" pitchFamily="34" charset="-120"/>
-              </a:rPr>
-              <a:t>真相信</a:t>
-            </a:r>
-            <a:endParaRPr lang="zh-TW" altLang="en-US" sz="6600" b="1" dirty="0">
-              <a:solidFill>
-                <a:srgbClr val="000066"/>
-              </a:solidFill>
-              <a:latin typeface="微軟正黑體" pitchFamily="34" charset="-120"/>
-              <a:ea typeface="微軟正黑體" pitchFamily="34" charset="-120"/>
-            </a:endParaRPr>
+              <a:t>我心相信  我真相信</a:t>
+            </a:r>
           </a:p>
         </p:txBody>
       </p:sp>
@@ -14761,31 +14145,7 @@
                   <a:srgbClr val="000066"/>
                 </a:solidFill>
               </a:rPr>
-              <a:t>( 1 </a:t>
-            </a:r>
-            <a:r>
-              <a:rPr lang="en-US" sz="3600" b="1" dirty="0" smtClean="0">
-                <a:solidFill>
-                  <a:srgbClr val="000066"/>
-                </a:solidFill>
-              </a:rPr>
-              <a:t>/ </a:t>
-            </a:r>
-            <a:r>
-              <a:rPr lang="en-US" sz="3600" b="1" dirty="0" smtClean="0">
-                <a:solidFill>
-                  <a:srgbClr val="000066"/>
-                </a:solidFill>
-              </a:rPr>
-              <a:t>5 </a:t>
-            </a:r>
-            <a:r>
-              <a:rPr lang="en-US" sz="3600" b="1" dirty="0" smtClean="0">
-                <a:solidFill>
-                  <a:srgbClr val="000066"/>
-                </a:solidFill>
-              </a:rPr>
-              <a:t>)</a:t>
+              <a:t>( 1 / 5 )</a:t>
             </a:r>
             <a:endParaRPr lang="vi-VN" sz="3600" b="1" dirty="0">
               <a:solidFill>
@@ -14860,13 +14220,6 @@
               </a:rPr>
               <a:t>耶穌替我受害</a:t>
             </a:r>
-            <a:endParaRPr lang="zh-TW" altLang="en-US" sz="6600" b="1" dirty="0">
-              <a:solidFill>
-                <a:srgbClr val="000066"/>
-              </a:solidFill>
-              <a:latin typeface="微軟正黑體" pitchFamily="34" charset="-120"/>
-              <a:ea typeface="微軟正黑體" pitchFamily="34" charset="-120"/>
-            </a:endParaRPr>
           </a:p>
         </p:txBody>
       </p:sp>
@@ -15083,31 +14436,7 @@
                   <a:srgbClr val="000066"/>
                 </a:solidFill>
               </a:rPr>
-              <a:t>( 1 </a:t>
-            </a:r>
-            <a:r>
-              <a:rPr lang="en-US" sz="3600" b="1" dirty="0" smtClean="0">
-                <a:solidFill>
-                  <a:srgbClr val="000066"/>
-                </a:solidFill>
-              </a:rPr>
-              <a:t>/ </a:t>
-            </a:r>
-            <a:r>
-              <a:rPr lang="en-US" sz="3600" b="1" dirty="0" smtClean="0">
-                <a:solidFill>
-                  <a:srgbClr val="000066"/>
-                </a:solidFill>
-              </a:rPr>
-              <a:t>5 </a:t>
-            </a:r>
-            <a:r>
-              <a:rPr lang="en-US" sz="3600" b="1" dirty="0" smtClean="0">
-                <a:solidFill>
-                  <a:srgbClr val="000066"/>
-                </a:solidFill>
-              </a:rPr>
-              <a:t>)</a:t>
+              <a:t>( 1 / 5 )</a:t>
             </a:r>
             <a:endParaRPr lang="vi-VN" sz="3600" b="1" dirty="0">
               <a:solidFill>
@@ -15182,13 +14511,6 @@
               </a:rPr>
               <a:t>天父愛子這樣受死</a:t>
             </a:r>
-            <a:endParaRPr lang="zh-TW" altLang="en-US" sz="6600" b="1" dirty="0">
-              <a:solidFill>
-                <a:srgbClr val="000066"/>
-              </a:solidFill>
-              <a:latin typeface="微軟正黑體" pitchFamily="34" charset="-120"/>
-              <a:ea typeface="微軟正黑體" pitchFamily="34" charset="-120"/>
-            </a:endParaRPr>
           </a:p>
         </p:txBody>
       </p:sp>
@@ -15405,31 +14727,7 @@
                   <a:srgbClr val="000066"/>
                 </a:solidFill>
               </a:rPr>
-              <a:t>( 1 </a:t>
-            </a:r>
-            <a:r>
-              <a:rPr lang="en-US" sz="3600" b="1" dirty="0" smtClean="0">
-                <a:solidFill>
-                  <a:srgbClr val="000066"/>
-                </a:solidFill>
-              </a:rPr>
-              <a:t>/ </a:t>
-            </a:r>
-            <a:r>
-              <a:rPr lang="en-US" sz="3600" b="1" dirty="0" smtClean="0">
-                <a:solidFill>
-                  <a:srgbClr val="000066"/>
-                </a:solidFill>
-              </a:rPr>
-              <a:t>5 </a:t>
-            </a:r>
-            <a:r>
-              <a:rPr lang="en-US" sz="3600" b="1" dirty="0" smtClean="0">
-                <a:solidFill>
-                  <a:srgbClr val="000066"/>
-                </a:solidFill>
-              </a:rPr>
-              <a:t>)</a:t>
+              <a:t>( 1 / 5 )</a:t>
             </a:r>
             <a:endParaRPr lang="vi-VN" sz="3600" b="1" dirty="0">
               <a:solidFill>
@@ -15504,13 +14802,6 @@
               </a:rPr>
               <a:t>焚身難報主愛</a:t>
             </a:r>
-            <a:endParaRPr lang="zh-TW" altLang="en-US" sz="6600" b="1" dirty="0">
-              <a:solidFill>
-                <a:srgbClr val="000066"/>
-              </a:solidFill>
-              <a:latin typeface="微軟正黑體" pitchFamily="34" charset="-120"/>
-              <a:ea typeface="微軟正黑體" pitchFamily="34" charset="-120"/>
-            </a:endParaRPr>
           </a:p>
         </p:txBody>
       </p:sp>
@@ -15727,31 +15018,7 @@
                   <a:srgbClr val="000066"/>
                 </a:solidFill>
               </a:rPr>
-              <a:t>( 1 </a:t>
-            </a:r>
-            <a:r>
-              <a:rPr lang="en-US" sz="3600" b="1" dirty="0" smtClean="0">
-                <a:solidFill>
-                  <a:srgbClr val="000066"/>
-                </a:solidFill>
-              </a:rPr>
-              <a:t>/ </a:t>
-            </a:r>
-            <a:r>
-              <a:rPr lang="en-US" sz="3600" b="1" dirty="0" smtClean="0">
-                <a:solidFill>
-                  <a:srgbClr val="000066"/>
-                </a:solidFill>
-              </a:rPr>
-              <a:t>5 </a:t>
-            </a:r>
-            <a:r>
-              <a:rPr lang="en-US" sz="3600" b="1" dirty="0" smtClean="0">
-                <a:solidFill>
-                  <a:srgbClr val="000066"/>
-                </a:solidFill>
-              </a:rPr>
-              <a:t>)</a:t>
+              <a:t>( 1 / 5 )</a:t>
             </a:r>
             <a:endParaRPr lang="vi-VN" sz="3600" b="1" dirty="0">
               <a:solidFill>
